--- a/assets/pptx/catalog-191.pptx
+++ b/assets/pptx/catalog-191.pptx
@@ -3557,7 +3557,7 @@
                 <a:ea typeface="Ebrima"/>
                 <a:cs typeface="Ebrima"/>
               </a:rPr>
-              <a:t>ስልጣኑ እጅግ ትልቅ ነው(4)</a:t>
+              <a:t>ስልጣኑ እጅግ ትልቅ ነው4</a:t>
             </a:r>
           </a:p>
           <a:p>
@@ -3835,7 +3835,7 @@
                 <a:ea typeface="Ebrima"/>
                 <a:cs typeface="Ebrima"/>
               </a:rPr>
-              <a:t>ስልጣኑ እጅግ ትልቅ ነው(4)</a:t>
+              <a:t>ስልጣኑ እጅግ ትልቅ ነው4</a:t>
             </a:r>
           </a:p>
         </p:txBody>
@@ -4059,7 +4059,7 @@
                 <a:ea typeface="Ebrima"/>
                 <a:cs typeface="Ebrima"/>
               </a:rPr>
-              <a:t>ስልጣኑ እጅግ ትልቅ ነው(8)</a:t>
+              <a:t>ስልጣኑ እጅግ ትልቅ ነው8</a:t>
             </a:r>
           </a:p>
         </p:txBody>
